--- a/images/包芊简介.pptx
+++ b/images/包芊简介.pptx
@@ -208,7 +208,7 @@
           <a:p>
             <a:fld id="{15A93C8B-4180-4C34-A729-728E8A317EA6}" type="datetimeFigureOut">
               <a:rPr lang="zh-CN" altLang="en-US" smtClean="0"/>
-              <a:t>2026/4/23</a:t>
+              <a:t>2026/5/4</a:t>
             </a:fld>
             <a:endParaRPr lang="zh-CN" altLang="en-US"/>
           </a:p>
@@ -706,7 +706,7 @@
           <a:p>
             <a:fld id="{91065FB5-8C5A-49D9-8ED5-AAFD5D40CD74}" type="datetimeFigureOut">
               <a:rPr lang="zh-CN" altLang="en-US" smtClean="0"/>
-              <a:t>2026/4/23</a:t>
+              <a:t>2026/5/4</a:t>
             </a:fld>
             <a:endParaRPr lang="zh-CN" altLang="en-US"/>
           </a:p>
@@ -904,7 +904,7 @@
           <a:p>
             <a:fld id="{91065FB5-8C5A-49D9-8ED5-AAFD5D40CD74}" type="datetimeFigureOut">
               <a:rPr lang="zh-CN" altLang="en-US" smtClean="0"/>
-              <a:t>2026/4/23</a:t>
+              <a:t>2026/5/4</a:t>
             </a:fld>
             <a:endParaRPr lang="zh-CN" altLang="en-US"/>
           </a:p>
@@ -1112,7 +1112,7 @@
           <a:p>
             <a:fld id="{91065FB5-8C5A-49D9-8ED5-AAFD5D40CD74}" type="datetimeFigureOut">
               <a:rPr lang="zh-CN" altLang="en-US" smtClean="0"/>
-              <a:t>2026/4/23</a:t>
+              <a:t>2026/5/4</a:t>
             </a:fld>
             <a:endParaRPr lang="zh-CN" altLang="en-US"/>
           </a:p>
@@ -1310,7 +1310,7 @@
           <a:p>
             <a:fld id="{91065FB5-8C5A-49D9-8ED5-AAFD5D40CD74}" type="datetimeFigureOut">
               <a:rPr lang="zh-CN" altLang="en-US" smtClean="0"/>
-              <a:t>2026/4/23</a:t>
+              <a:t>2026/5/4</a:t>
             </a:fld>
             <a:endParaRPr lang="zh-CN" altLang="en-US"/>
           </a:p>
@@ -1585,7 +1585,7 @@
           <a:p>
             <a:fld id="{91065FB5-8C5A-49D9-8ED5-AAFD5D40CD74}" type="datetimeFigureOut">
               <a:rPr lang="zh-CN" altLang="en-US" smtClean="0"/>
-              <a:t>2026/4/23</a:t>
+              <a:t>2026/5/4</a:t>
             </a:fld>
             <a:endParaRPr lang="zh-CN" altLang="en-US"/>
           </a:p>
@@ -1850,7 +1850,7 @@
           <a:p>
             <a:fld id="{91065FB5-8C5A-49D9-8ED5-AAFD5D40CD74}" type="datetimeFigureOut">
               <a:rPr lang="zh-CN" altLang="en-US" smtClean="0"/>
-              <a:t>2026/4/23</a:t>
+              <a:t>2026/5/4</a:t>
             </a:fld>
             <a:endParaRPr lang="zh-CN" altLang="en-US"/>
           </a:p>
@@ -2262,7 +2262,7 @@
           <a:p>
             <a:fld id="{91065FB5-8C5A-49D9-8ED5-AAFD5D40CD74}" type="datetimeFigureOut">
               <a:rPr lang="zh-CN" altLang="en-US" smtClean="0"/>
-              <a:t>2026/4/23</a:t>
+              <a:t>2026/5/4</a:t>
             </a:fld>
             <a:endParaRPr lang="zh-CN" altLang="en-US"/>
           </a:p>
@@ -2403,7 +2403,7 @@
           <a:p>
             <a:fld id="{91065FB5-8C5A-49D9-8ED5-AAFD5D40CD74}" type="datetimeFigureOut">
               <a:rPr lang="zh-CN" altLang="en-US" smtClean="0"/>
-              <a:t>2026/4/23</a:t>
+              <a:t>2026/5/4</a:t>
             </a:fld>
             <a:endParaRPr lang="zh-CN" altLang="en-US"/>
           </a:p>
@@ -2516,7 +2516,7 @@
           <a:p>
             <a:fld id="{91065FB5-8C5A-49D9-8ED5-AAFD5D40CD74}" type="datetimeFigureOut">
               <a:rPr lang="zh-CN" altLang="en-US" smtClean="0"/>
-              <a:t>2026/4/23</a:t>
+              <a:t>2026/5/4</a:t>
             </a:fld>
             <a:endParaRPr lang="zh-CN" altLang="en-US"/>
           </a:p>
@@ -2827,7 +2827,7 @@
           <a:p>
             <a:fld id="{91065FB5-8C5A-49D9-8ED5-AAFD5D40CD74}" type="datetimeFigureOut">
               <a:rPr lang="zh-CN" altLang="en-US" smtClean="0"/>
-              <a:t>2026/4/23</a:t>
+              <a:t>2026/5/4</a:t>
             </a:fld>
             <a:endParaRPr lang="zh-CN" altLang="en-US"/>
           </a:p>
@@ -3115,7 +3115,7 @@
           <a:p>
             <a:fld id="{91065FB5-8C5A-49D9-8ED5-AAFD5D40CD74}" type="datetimeFigureOut">
               <a:rPr lang="zh-CN" altLang="en-US" smtClean="0"/>
-              <a:t>2026/4/23</a:t>
+              <a:t>2026/5/4</a:t>
             </a:fld>
             <a:endParaRPr lang="zh-CN" altLang="en-US"/>
           </a:p>
@@ -3356,7 +3356,7 @@
           <a:p>
             <a:fld id="{91065FB5-8C5A-49D9-8ED5-AAFD5D40CD74}" type="datetimeFigureOut">
               <a:rPr lang="zh-CN" altLang="en-US" smtClean="0"/>
-              <a:t>2026/4/23</a:t>
+              <a:t>2026/5/4</a:t>
             </a:fld>
             <a:endParaRPr lang="zh-CN" altLang="en-US"/>
           </a:p>
